--- a/docs/gtm/deck/CowTalk_GTM_Deck.pptx
+++ b/docs/gtm/deck/CowTalk_GTM_Deck.pptx
@@ -2949,7 +2949,37 @@
           </a:p>
           <a:p>
             <a:r>
-              <a:t>플랫폼 개발·운영·CS·데이터센터를 전부 해야 합니다. 볼륨이 커지면 단가가 내려가는 구조를 함께 만들어 주십시오."</a:t>
+              <a:t>플랫폼 개발·운영·CS·데이터센터를 전부 해야 합니다. 하드웨어 없이 구독으로만 가는 구조이니</a:t>
+            </a:r>
+          </a:p>
+          <a:p>
+            <a:r>
+              <a:t>볼륨 구간별로 단가가 내려가는 테이블을 함께 만들어 주십시오."</a:t>
+            </a:r>
+          </a:p>
+          <a:p>
+            <a:r>
+              <a:t>성장 시나리오: 3년차 80,000두 기준 매출 150.9억, 기여이익 31.78억,</a:t>
+            </a:r>
+          </a:p>
+          <a:p>
+            <a:r>
+              <a:t>고정비 5억(5~6인) 차감 시 영업이익 26.78억. 1년차도 +1.46억으로 흑자다.</a:t>
+            </a:r>
+          </a:p>
+          <a:p>
+            <a:r>
+              <a:t>심의에서 반드시 나오는 질문: "1인 회사가 이 규모를 감당합니까?"</a:t>
+            </a:r>
+          </a:p>
+          <a:p>
+            <a:r>
+              <a:t>준비된 답 셋 — ① 플랫폼이 이미 자동화돼 있다 ② 실행은 파트너·외주가 한다</a:t>
+            </a:r>
+          </a:p>
+          <a:p>
+            <a:r>
+              <a:t>③ 고정비가 낮아 적자 없이 단계적으로 확충할 수 있다. 먼저 말해야 방어된다.</a:t>
             </a:r>
           </a:p>
         </p:txBody>
@@ -40048,7 +40078,7 @@
                 <a:ea typeface="맑은 고딕"/>
                 <a:cs typeface="맑은 고딕"/>
               </a:rPr>
-              <a:t>데이터센터 — 주권 · 보관 · 감사</a:t>
+              <a:t>데이터센터 — 주권 · 보관 · 감사 (외주)</a:t>
             </a:r>
           </a:p>
           <a:p>
@@ -40066,7 +40096,18 @@
                 <a:ea typeface="맑은 고딕"/>
                 <a:cs typeface="맑은 고딕"/>
               </a:rPr>
-              <a:t>데이터 보관·연산·백업 · 접근통제 · 국가별 소버린 존 운영</a:t>
+              <a:t>보관·연산·백업 · 접근통제 · 소버린 존. </a:t>
+            </a:r>
+            <a:r>
+              <a:rPr sz="930" b="1">
+                <a:solidFill>
+                  <a:srgbClr val="0B2239"/>
+                </a:solidFill>
+                <a:latin typeface="맑은 고딕"/>
+                <a:ea typeface="맑은 고딕"/>
+                <a:cs typeface="맑은 고딕"/>
+              </a:rPr>
+              <a:t>D2O는 계약·감독만, 직접 운영하지 않는다</a:t>
             </a:r>
           </a:p>
         </p:txBody>
@@ -40107,7 +40148,7 @@
                 <a:ea typeface="Consolas"/>
                 <a:cs typeface="Consolas"/>
               </a:rPr>
-              <a:t>국가 · 지자체 (또는 합작 SPC)</a:t>
+              <a:t>운영사 미선정</a:t>
             </a:r>
           </a:p>
         </p:txBody>
@@ -40278,7 +40319,7 @@
                 <a:ea typeface="맑은 고딕"/>
                 <a:cs typeface="맑은 고딕"/>
               </a:rPr>
-              <a:t>D2O Corp — CowTalk 개발 · 운영</a:t>
+              <a:t>농업회사법인 (주)디투오 — 플랫폼 · 영업 · 교육</a:t>
             </a:r>
           </a:p>
           <a:p>
@@ -40296,7 +40337,18 @@
                 <a:ea typeface="맑은 고딕"/>
                 <a:cs typeface="맑은 고딕"/>
               </a:rPr>
-              <a:t>AI 해석 · 4역할 서비스 · 공공데이터 커넥터 · 현지화 어댑터</a:t>
+              <a:t>AI 해석 · 4역할 서비스 · 커넥터 · 자사 영업 고객 센서 공급 · </a:t>
+            </a:r>
+            <a:r>
+              <a:rPr sz="930" b="1">
+                <a:solidFill>
+                  <a:srgbClr val="0B2239"/>
+                </a:solidFill>
+                <a:latin typeface="맑은 고딕"/>
+                <a:ea typeface="맑은 고딕"/>
+                <a:cs typeface="맑은 고딕"/>
+              </a:rPr>
+              <a:t>실행은 파트너 교육으로 확장</a:t>
             </a:r>
           </a:p>
         </p:txBody>
@@ -45655,7 +45707,7 @@
                 <a:ea typeface="맑은 고딕"/>
                 <a:cs typeface="맑은 고딕"/>
               </a:rPr>
-              <a:t>현행 실거래 구조입니다. 설계안이 아닙니다. 하드웨어는 별도 청구 없이 구독료에 전부 포함됩니다.</a:t>
+              <a:t>현행 실거래 구조입니다. smaXtec까지 밸류체인 전 구간이 순수 구독 — 하드웨어 비용이 아예 없습니다.</a:t>
             </a:r>
           </a:p>
         </p:txBody>
@@ -45669,7 +45721,7 @@
         <p:spPr>
           <a:xfrm>
             <a:off x="713232" y="2468880"/>
-            <a:ext cx="1485711" cy="219456"/>
+            <a:ext cx="1773712" cy="219456"/>
           </a:xfrm>
           <a:prstGeom prst="rect">
             <a:avLst/>
@@ -45709,21 +45761,21 @@
         </p:nvSpPr>
         <p:spPr>
           <a:xfrm>
-            <a:off x="2272095" y="2468880"/>
-            <a:ext cx="1183995" cy="219456"/>
-          </a:xfrm>
-          <a:prstGeom prst="rect">
-            <a:avLst/>
-          </a:prstGeom>
-          <a:noFill/>
-        </p:spPr>
-        <p:txBody>
-          <a:bodyPr wrap="square" anchor="t" lIns="0" rIns="0" tIns="0" bIns="0">
-            <a:spAutoFit/>
-          </a:bodyPr>
-          <a:lstStyle/>
-          <a:p>
-            <a:pPr algn="l">
+            <a:off x="2560096" y="2468880"/>
+            <a:ext cx="665593" cy="219456"/>
+          </a:xfrm>
+          <a:prstGeom prst="rect">
+            <a:avLst/>
+          </a:prstGeom>
+          <a:noFill/>
+        </p:spPr>
+        <p:txBody>
+          <a:bodyPr wrap="square" anchor="t" lIns="0" rIns="0" tIns="0" bIns="0">
+            <a:spAutoFit/>
+          </a:bodyPr>
+          <a:lstStyle/>
+          <a:p>
+            <a:pPr algn="r">
               <a:lnSpc>
                 <a:spcPct val="124000"/>
               </a:lnSpc>
@@ -45750,8 +45802,8 @@
         </p:nvSpPr>
         <p:spPr>
           <a:xfrm>
-            <a:off x="3529242" y="2468880"/>
-            <a:ext cx="550393" cy="219456"/>
+            <a:off x="3298841" y="2468880"/>
+            <a:ext cx="665593" cy="219456"/>
           </a:xfrm>
           <a:prstGeom prst="rect">
             <a:avLst/>
@@ -45791,8 +45843,8 @@
         </p:nvSpPr>
         <p:spPr>
           <a:xfrm>
-            <a:off x="4152787" y="2468880"/>
-            <a:ext cx="550393" cy="219456"/>
+            <a:off x="4037587" y="2468880"/>
+            <a:ext cx="665593" cy="219456"/>
           </a:xfrm>
           <a:prstGeom prst="rect">
             <a:avLst/>
@@ -45869,7 +45921,7 @@
         <p:spPr>
           <a:xfrm>
             <a:off x="713232" y="2825496"/>
-            <a:ext cx="1485711" cy="384048"/>
+            <a:ext cx="1773712" cy="336296"/>
           </a:xfrm>
           <a:prstGeom prst="rect">
             <a:avLst/>
@@ -45909,21 +45961,21 @@
         </p:nvSpPr>
         <p:spPr>
           <a:xfrm>
-            <a:off x="2272095" y="2825496"/>
-            <a:ext cx="1183995" cy="384048"/>
-          </a:xfrm>
-          <a:prstGeom prst="rect">
-            <a:avLst/>
-          </a:prstGeom>
-          <a:noFill/>
-        </p:spPr>
-        <p:txBody>
-          <a:bodyPr wrap="square" anchor="t" lIns="0" rIns="0" tIns="0" bIns="0">
-            <a:spAutoFit/>
-          </a:bodyPr>
-          <a:lstStyle/>
-          <a:p>
-            <a:pPr algn="l">
+            <a:off x="2560096" y="2825496"/>
+            <a:ext cx="665593" cy="336296"/>
+          </a:xfrm>
+          <a:prstGeom prst="rect">
+            <a:avLst/>
+          </a:prstGeom>
+          <a:noFill/>
+        </p:spPr>
+        <p:txBody>
+          <a:bodyPr wrap="square" anchor="t" lIns="0" rIns="0" tIns="0" bIns="0">
+            <a:spAutoFit/>
+          </a:bodyPr>
+          <a:lstStyle/>
+          <a:p>
+            <a:pPr algn="r">
               <a:lnSpc>
                 <a:spcPct val="118000"/>
               </a:lnSpc>
@@ -45932,52 +45984,52 @@
               <a:rPr sz="960" b="0">
                 <a:solidFill>
                   <a:srgbClr val="243B53"/>
-                </a:solidFill>
-                <a:latin typeface="맑은 고딕"/>
-                <a:ea typeface="맑은 고딕"/>
-                <a:cs typeface="맑은 고딕"/>
-              </a:rPr>
-              <a:t>지불</a:t>
-            </a:r>
-          </a:p>
-        </p:txBody>
-      </p:sp>
-      <p:sp>
-        <p:nvSpPr>
-          <p:cNvPr id="15" name="TextBox 14"/>
-          <p:cNvSpPr txBox="1"/>
-          <p:nvPr/>
-        </p:nvSpPr>
-        <p:spPr>
-          <a:xfrm>
-            <a:off x="3529242" y="2825496"/>
-            <a:ext cx="550393" cy="384048"/>
-          </a:xfrm>
-          <a:prstGeom prst="rect">
-            <a:avLst/>
-          </a:prstGeom>
-          <a:noFill/>
-        </p:spPr>
-        <p:txBody>
-          <a:bodyPr wrap="square" anchor="t" lIns="0" rIns="0" tIns="0" bIns="0">
-            <a:spAutoFit/>
-          </a:bodyPr>
-          <a:lstStyle/>
-          <a:p>
-            <a:pPr algn="r">
-              <a:lnSpc>
-                <a:spcPct val="118000"/>
-              </a:lnSpc>
-            </a:pPr>
-            <a:r>
-              <a:rPr sz="960" b="1">
-                <a:solidFill>
-                  <a:srgbClr val="0B2239"/>
                 </a:solidFill>
                 <a:latin typeface="Consolas"/>
                 <a:ea typeface="Consolas"/>
                 <a:cs typeface="Consolas"/>
               </a:rPr>
+              <a:t>지불</a:t>
+            </a:r>
+          </a:p>
+        </p:txBody>
+      </p:sp>
+      <p:sp>
+        <p:nvSpPr>
+          <p:cNvPr id="15" name="TextBox 14"/>
+          <p:cNvSpPr txBox="1"/>
+          <p:nvPr/>
+        </p:nvSpPr>
+        <p:spPr>
+          <a:xfrm>
+            <a:off x="3298841" y="2825496"/>
+            <a:ext cx="665593" cy="336296"/>
+          </a:xfrm>
+          <a:prstGeom prst="rect">
+            <a:avLst/>
+          </a:prstGeom>
+          <a:noFill/>
+        </p:spPr>
+        <p:txBody>
+          <a:bodyPr wrap="square" anchor="t" lIns="0" rIns="0" tIns="0" bIns="0">
+            <a:spAutoFit/>
+          </a:bodyPr>
+          <a:lstStyle/>
+          <a:p>
+            <a:pPr algn="r">
+              <a:lnSpc>
+                <a:spcPct val="118000"/>
+              </a:lnSpc>
+            </a:pPr>
+            <a:r>
+              <a:rPr sz="960" b="1">
+                <a:solidFill>
+                  <a:srgbClr val="0B2239"/>
+                </a:solidFill>
+                <a:latin typeface="Consolas"/>
+                <a:ea typeface="Consolas"/>
+                <a:cs typeface="Consolas"/>
+              </a:rPr>
               <a:t>12,000</a:t>
             </a:r>
           </a:p>
@@ -45991,8 +46043,8 @@
         </p:nvSpPr>
         <p:spPr>
           <a:xfrm>
-            <a:off x="4152787" y="2825496"/>
-            <a:ext cx="550393" cy="384048"/>
+            <a:off x="4037587" y="2825496"/>
+            <a:ext cx="665593" cy="336296"/>
           </a:xfrm>
           <a:prstGeom prst="rect">
             <a:avLst/>
@@ -46032,7 +46084,7 @@
         </p:nvCxnSpPr>
         <p:spPr>
           <a:xfrm>
-            <a:off x="713232" y="3172968"/>
+            <a:off x="713232" y="3125216"/>
             <a:ext cx="4063101" cy="0"/>
           </a:xfrm>
           <a:prstGeom prst="bentConnector3">
@@ -46068,8 +46120,8 @@
         </p:nvSpPr>
         <p:spPr>
           <a:xfrm>
-            <a:off x="713232" y="3209544"/>
-            <a:ext cx="1485711" cy="384048"/>
+            <a:off x="713232" y="3161792"/>
+            <a:ext cx="1773712" cy="336296"/>
           </a:xfrm>
           <a:prstGeom prst="rect">
             <a:avLst/>
@@ -46109,21 +46161,21 @@
         </p:nvSpPr>
         <p:spPr>
           <a:xfrm>
-            <a:off x="2272095" y="3209544"/>
-            <a:ext cx="1183995" cy="384048"/>
-          </a:xfrm>
-          <a:prstGeom prst="rect">
-            <a:avLst/>
-          </a:prstGeom>
-          <a:noFill/>
-        </p:spPr>
-        <p:txBody>
-          <a:bodyPr wrap="square" anchor="t" lIns="0" rIns="0" tIns="0" bIns="0">
-            <a:spAutoFit/>
-          </a:bodyPr>
-          <a:lstStyle/>
-          <a:p>
-            <a:pPr algn="l">
+            <a:off x="2560096" y="3161792"/>
+            <a:ext cx="665593" cy="336296"/>
+          </a:xfrm>
+          <a:prstGeom prst="rect">
+            <a:avLst/>
+          </a:prstGeom>
+          <a:noFill/>
+        </p:spPr>
+        <p:txBody>
+          <a:bodyPr wrap="square" anchor="t" lIns="0" rIns="0" tIns="0" bIns="0">
+            <a:spAutoFit/>
+          </a:bodyPr>
+          <a:lstStyle/>
+          <a:p>
+            <a:pPr algn="r">
               <a:lnSpc>
                 <a:spcPct val="118000"/>
               </a:lnSpc>
@@ -46132,52 +46184,52 @@
               <a:rPr sz="960" b="0">
                 <a:solidFill>
                   <a:srgbClr val="243B53"/>
-                </a:solidFill>
-                <a:latin typeface="맑은 고딕"/>
-                <a:ea typeface="맑은 고딕"/>
-                <a:cs typeface="맑은 고딕"/>
-              </a:rPr>
-              <a:t>수입 · 통관 · 유통</a:t>
-            </a:r>
-          </a:p>
-        </p:txBody>
-      </p:sp>
-      <p:sp>
-        <p:nvSpPr>
-          <p:cNvPr id="20" name="TextBox 19"/>
-          <p:cNvSpPr txBox="1"/>
-          <p:nvPr/>
-        </p:nvSpPr>
-        <p:spPr>
-          <a:xfrm>
-            <a:off x="3529242" y="3209544"/>
-            <a:ext cx="550393" cy="384048"/>
-          </a:xfrm>
-          <a:prstGeom prst="rect">
-            <a:avLst/>
-          </a:prstGeom>
-          <a:noFill/>
-        </p:spPr>
-        <p:txBody>
-          <a:bodyPr wrap="square" anchor="t" lIns="0" rIns="0" tIns="0" bIns="0">
-            <a:spAutoFit/>
-          </a:bodyPr>
-          <a:lstStyle/>
-          <a:p>
-            <a:pPr algn="r">
-              <a:lnSpc>
-                <a:spcPct val="118000"/>
-              </a:lnSpc>
-            </a:pPr>
-            <a:r>
-              <a:rPr sz="960" b="1">
-                <a:solidFill>
-                  <a:srgbClr val="0B2239"/>
                 </a:solidFill>
                 <a:latin typeface="Consolas"/>
                 <a:ea typeface="Consolas"/>
                 <a:cs typeface="Consolas"/>
               </a:rPr>
+              <a:t>수입 · 통관 · 유통</a:t>
+            </a:r>
+          </a:p>
+        </p:txBody>
+      </p:sp>
+      <p:sp>
+        <p:nvSpPr>
+          <p:cNvPr id="20" name="TextBox 19"/>
+          <p:cNvSpPr txBox="1"/>
+          <p:nvPr/>
+        </p:nvSpPr>
+        <p:spPr>
+          <a:xfrm>
+            <a:off x="3298841" y="3161792"/>
+            <a:ext cx="665593" cy="336296"/>
+          </a:xfrm>
+          <a:prstGeom prst="rect">
+            <a:avLst/>
+          </a:prstGeom>
+          <a:noFill/>
+        </p:spPr>
+        <p:txBody>
+          <a:bodyPr wrap="square" anchor="t" lIns="0" rIns="0" tIns="0" bIns="0">
+            <a:spAutoFit/>
+          </a:bodyPr>
+          <a:lstStyle/>
+          <a:p>
+            <a:pPr algn="r">
+              <a:lnSpc>
+                <a:spcPct val="118000"/>
+              </a:lnSpc>
+            </a:pPr>
+            <a:r>
+              <a:rPr sz="960" b="1">
+                <a:solidFill>
+                  <a:srgbClr val="0B2239"/>
+                </a:solidFill>
+                <a:latin typeface="Consolas"/>
+                <a:ea typeface="Consolas"/>
+                <a:cs typeface="Consolas"/>
+              </a:rPr>
               <a:t>(7,700)</a:t>
             </a:r>
           </a:p>
@@ -46191,8 +46243,8 @@
         </p:nvSpPr>
         <p:spPr>
           <a:xfrm>
-            <a:off x="4152787" y="3209544"/>
-            <a:ext cx="550393" cy="384048"/>
+            <a:off x="4037587" y="3161792"/>
+            <a:ext cx="665593" cy="336296"/>
           </a:xfrm>
           <a:prstGeom prst="rect">
             <a:avLst/>
@@ -46232,7 +46284,7 @@
         </p:nvCxnSpPr>
         <p:spPr>
           <a:xfrm>
-            <a:off x="713232" y="3557015"/>
+            <a:off x="713232" y="3461512"/>
             <a:ext cx="4063101" cy="0"/>
           </a:xfrm>
           <a:prstGeom prst="bentConnector3">
@@ -46268,8 +46320,8 @@
         </p:nvSpPr>
         <p:spPr>
           <a:xfrm>
-            <a:off x="713232" y="3593591"/>
-            <a:ext cx="1485711" cy="384048"/>
+            <a:off x="713232" y="3498088"/>
+            <a:ext cx="1773712" cy="336296"/>
           </a:xfrm>
           <a:prstGeom prst="rect">
             <a:avLst/>
@@ -46296,7 +46348,7 @@
                 <a:ea typeface="맑은 고딕"/>
                 <a:cs typeface="맑은 고딕"/>
               </a:rPr>
-              <a:t>↳ smaXtec 몫 (추정)</a:t>
+              <a:t>↳ smaXtec 구독료 + KG 마진</a:t>
             </a:r>
           </a:p>
         </p:txBody>
@@ -46309,49 +46361,8 @@
         </p:nvSpPr>
         <p:spPr>
           <a:xfrm>
-            <a:off x="2272095" y="3593591"/>
-            <a:ext cx="1183995" cy="384048"/>
-          </a:xfrm>
-          <a:prstGeom prst="rect">
-            <a:avLst/>
-          </a:prstGeom>
-          <a:noFill/>
-        </p:spPr>
-        <p:txBody>
-          <a:bodyPr wrap="square" anchor="t" lIns="0" rIns="0" tIns="0" bIns="0">
-            <a:spAutoFit/>
-          </a:bodyPr>
-          <a:lstStyle/>
-          <a:p>
-            <a:pPr algn="l">
-              <a:lnSpc>
-                <a:spcPct val="118000"/>
-              </a:lnSpc>
-            </a:pPr>
-            <a:r>
-              <a:rPr sz="960" b="0">
-                <a:solidFill>
-                  <a:srgbClr val="243B53"/>
-                </a:solidFill>
-                <a:latin typeface="맑은 고딕"/>
-                <a:ea typeface="맑은 고딕"/>
-                <a:cs typeface="맑은 고딕"/>
-              </a:rPr>
-              <a:t>제조 · 데이터 해석</a:t>
-            </a:r>
-          </a:p>
-        </p:txBody>
-      </p:sp>
-      <p:sp>
-        <p:nvSpPr>
-          <p:cNvPr id="25" name="TextBox 24"/>
-          <p:cNvSpPr txBox="1"/>
-          <p:nvPr/>
-        </p:nvSpPr>
-        <p:spPr>
-          <a:xfrm>
-            <a:off x="3529242" y="3593591"/>
-            <a:ext cx="550393" cy="384048"/>
+            <a:off x="2560096" y="3498088"/>
+            <a:ext cx="665593" cy="336296"/>
           </a:xfrm>
           <a:prstGeom prst="rect">
             <a:avLst/>
@@ -46378,21 +46389,21 @@
                 <a:ea typeface="Consolas"/>
                 <a:cs typeface="Consolas"/>
               </a:rPr>
-              <a:t>약 6,220</a:t>
-            </a:r>
-          </a:p>
-        </p:txBody>
-      </p:sp>
-      <p:sp>
-        <p:nvSpPr>
-          <p:cNvPr id="26" name="TextBox 25"/>
-          <p:cNvSpPr txBox="1"/>
-          <p:nvPr/>
-        </p:nvSpPr>
-        <p:spPr>
-          <a:xfrm>
-            <a:off x="4152787" y="3593591"/>
-            <a:ext cx="550393" cy="384048"/>
+              <a:t>내역은 KG만 안다</a:t>
+            </a:r>
+          </a:p>
+        </p:txBody>
+      </p:sp>
+      <p:sp>
+        <p:nvSpPr>
+          <p:cNvPr id="25" name="TextBox 24"/>
+          <p:cNvSpPr txBox="1"/>
+          <p:nvPr/>
+        </p:nvSpPr>
+        <p:spPr>
+          <a:xfrm>
+            <a:off x="3298841" y="3498088"/>
+            <a:ext cx="665593" cy="336296"/>
           </a:xfrm>
           <a:prstGeom prst="rect">
             <a:avLst/>
@@ -46419,7 +46430,48 @@
                 <a:ea typeface="Consolas"/>
                 <a:cs typeface="Consolas"/>
               </a:rPr>
-              <a:t>51.8%</a:t>
+              <a:t>7,700</a:t>
+            </a:r>
+          </a:p>
+        </p:txBody>
+      </p:sp>
+      <p:sp>
+        <p:nvSpPr>
+          <p:cNvPr id="26" name="TextBox 25"/>
+          <p:cNvSpPr txBox="1"/>
+          <p:nvPr/>
+        </p:nvSpPr>
+        <p:spPr>
+          <a:xfrm>
+            <a:off x="4037587" y="3498088"/>
+            <a:ext cx="665593" cy="336296"/>
+          </a:xfrm>
+          <a:prstGeom prst="rect">
+            <a:avLst/>
+          </a:prstGeom>
+          <a:noFill/>
+        </p:spPr>
+        <p:txBody>
+          <a:bodyPr wrap="square" anchor="t" lIns="0" rIns="0" tIns="0" bIns="0">
+            <a:spAutoFit/>
+          </a:bodyPr>
+          <a:lstStyle/>
+          <a:p>
+            <a:pPr algn="r">
+              <a:lnSpc>
+                <a:spcPct val="118000"/>
+              </a:lnSpc>
+            </a:pPr>
+            <a:r>
+              <a:rPr sz="960" b="0">
+                <a:solidFill>
+                  <a:srgbClr val="243B53"/>
+                </a:solidFill>
+                <a:latin typeface="Consolas"/>
+                <a:ea typeface="Consolas"/>
+                <a:cs typeface="Consolas"/>
+              </a:rPr>
+              <a:t>—</a:t>
             </a:r>
           </a:p>
         </p:txBody>
@@ -46432,7 +46484,7 @@
         </p:nvCxnSpPr>
         <p:spPr>
           <a:xfrm>
-            <a:off x="713232" y="3941063"/>
+            <a:off x="713232" y="3797808"/>
             <a:ext cx="4063101" cy="0"/>
           </a:xfrm>
           <a:prstGeom prst="bentConnector3">
@@ -46468,8 +46520,8 @@
         </p:nvSpPr>
         <p:spPr>
           <a:xfrm>
-            <a:off x="713232" y="3977639"/>
-            <a:ext cx="1485711" cy="384048"/>
+            <a:off x="713232" y="3834384"/>
+            <a:ext cx="1773712" cy="336296"/>
           </a:xfrm>
           <a:prstGeom prst="rect">
             <a:avLst/>
@@ -46488,15 +46540,15 @@
               </a:lnSpc>
             </a:pPr>
             <a:r>
-              <a:rPr sz="960" b="0">
-                <a:solidFill>
-                  <a:srgbClr val="243B53"/>
-                </a:solidFill>
-                <a:latin typeface="맑은 고딕"/>
-                <a:ea typeface="맑은 고딕"/>
-                <a:cs typeface="맑은 고딕"/>
-              </a:rPr>
-              <a:t>↳ KG 수입 마진 (추정)</a:t>
+              <a:rPr sz="960" b="1">
+                <a:solidFill>
+                  <a:srgbClr val="0B2239"/>
+                </a:solidFill>
+                <a:latin typeface="맑은 고딕"/>
+                <a:ea typeface="맑은 고딕"/>
+                <a:cs typeface="맑은 고딕"/>
+              </a:rPr>
+              <a:t>D2O</a:t>
             </a:r>
           </a:p>
         </p:txBody>
@@ -46509,49 +46561,8 @@
         </p:nvSpPr>
         <p:spPr>
           <a:xfrm>
-            <a:off x="2272095" y="3977639"/>
-            <a:ext cx="1183995" cy="384048"/>
-          </a:xfrm>
-          <a:prstGeom prst="rect">
-            <a:avLst/>
-          </a:prstGeom>
-          <a:noFill/>
-        </p:spPr>
-        <p:txBody>
-          <a:bodyPr wrap="square" anchor="t" lIns="0" rIns="0" tIns="0" bIns="0">
-            <a:spAutoFit/>
-          </a:bodyPr>
-          <a:lstStyle/>
-          <a:p>
-            <a:pPr algn="l">
-              <a:lnSpc>
-                <a:spcPct val="118000"/>
-              </a:lnSpc>
-            </a:pPr>
-            <a:r>
-              <a:rPr sz="960" b="0">
-                <a:solidFill>
-                  <a:srgbClr val="243B53"/>
-                </a:solidFill>
-                <a:latin typeface="맑은 고딕"/>
-                <a:ea typeface="맑은 고딕"/>
-                <a:cs typeface="맑은 고딕"/>
-              </a:rPr>
-              <a:t>통관 · 유통 · 재고</a:t>
-            </a:r>
-          </a:p>
-        </p:txBody>
-      </p:sp>
-      <p:sp>
-        <p:nvSpPr>
-          <p:cNvPr id="30" name="TextBox 29"/>
-          <p:cNvSpPr txBox="1"/>
-          <p:nvPr/>
-        </p:nvSpPr>
-        <p:spPr>
-          <a:xfrm>
-            <a:off x="3529242" y="3977639"/>
-            <a:ext cx="550393" cy="384048"/>
+            <a:off x="2560096" y="3834384"/>
+            <a:ext cx="665593" cy="336296"/>
           </a:xfrm>
           <a:prstGeom prst="rect">
             <a:avLst/>
@@ -46578,21 +46589,21 @@
                 <a:ea typeface="Consolas"/>
                 <a:cs typeface="Consolas"/>
               </a:rPr>
-              <a:t>약 1,480</a:t>
-            </a:r>
-          </a:p>
-        </p:txBody>
-      </p:sp>
-      <p:sp>
-        <p:nvSpPr>
-          <p:cNvPr id="31" name="TextBox 30"/>
-          <p:cNvSpPr txBox="1"/>
-          <p:nvPr/>
-        </p:nvSpPr>
-        <p:spPr>
-          <a:xfrm>
-            <a:off x="4152787" y="3977639"/>
-            <a:ext cx="550393" cy="384048"/>
+              <a:t>판매 · 플랫폼 · 운영</a:t>
+            </a:r>
+          </a:p>
+        </p:txBody>
+      </p:sp>
+      <p:sp>
+        <p:nvSpPr>
+          <p:cNvPr id="30" name="TextBox 29"/>
+          <p:cNvSpPr txBox="1"/>
+          <p:nvPr/>
+        </p:nvSpPr>
+        <p:spPr>
+          <a:xfrm>
+            <a:off x="3298841" y="3834384"/>
+            <a:ext cx="665593" cy="336296"/>
           </a:xfrm>
           <a:prstGeom prst="rect">
             <a:avLst/>
@@ -46611,15 +46622,56 @@
               </a:lnSpc>
             </a:pPr>
             <a:r>
-              <a:rPr sz="960" b="0">
-                <a:solidFill>
-                  <a:srgbClr val="243B53"/>
+              <a:rPr sz="960" b="1">
+                <a:solidFill>
+                  <a:srgbClr val="0B2239"/>
                 </a:solidFill>
                 <a:latin typeface="Consolas"/>
                 <a:ea typeface="Consolas"/>
                 <a:cs typeface="Consolas"/>
               </a:rPr>
-              <a:t>12.3%</a:t>
+              <a:t>4,300</a:t>
+            </a:r>
+          </a:p>
+        </p:txBody>
+      </p:sp>
+      <p:sp>
+        <p:nvSpPr>
+          <p:cNvPr id="31" name="TextBox 30"/>
+          <p:cNvSpPr txBox="1"/>
+          <p:nvPr/>
+        </p:nvSpPr>
+        <p:spPr>
+          <a:xfrm>
+            <a:off x="4037587" y="3834384"/>
+            <a:ext cx="665593" cy="336296"/>
+          </a:xfrm>
+          <a:prstGeom prst="rect">
+            <a:avLst/>
+          </a:prstGeom>
+          <a:noFill/>
+        </p:spPr>
+        <p:txBody>
+          <a:bodyPr wrap="square" anchor="t" lIns="0" rIns="0" tIns="0" bIns="0">
+            <a:spAutoFit/>
+          </a:bodyPr>
+          <a:lstStyle/>
+          <a:p>
+            <a:pPr algn="r">
+              <a:lnSpc>
+                <a:spcPct val="118000"/>
+              </a:lnSpc>
+            </a:pPr>
+            <a:r>
+              <a:rPr sz="960" b="1">
+                <a:solidFill>
+                  <a:srgbClr val="0B2239"/>
+                </a:solidFill>
+                <a:latin typeface="Consolas"/>
+                <a:ea typeface="Consolas"/>
+                <a:cs typeface="Consolas"/>
+              </a:rPr>
+              <a:t>35.8%</a:t>
             </a:r>
           </a:p>
         </p:txBody>
@@ -46632,7 +46684,7 @@
         </p:nvCxnSpPr>
         <p:spPr>
           <a:xfrm>
-            <a:off x="713232" y="4325112"/>
+            <a:off x="713232" y="4134104"/>
             <a:ext cx="4063101" cy="0"/>
           </a:xfrm>
           <a:prstGeom prst="bentConnector3">
@@ -46668,8 +46720,8 @@
         </p:nvSpPr>
         <p:spPr>
           <a:xfrm>
-            <a:off x="713232" y="4361688"/>
-            <a:ext cx="1485711" cy="384048"/>
+            <a:off x="713232" y="4170680"/>
+            <a:ext cx="1773712" cy="336296"/>
           </a:xfrm>
           <a:prstGeom prst="rect">
             <a:avLst/>
@@ -46688,15 +46740,15 @@
               </a:lnSpc>
             </a:pPr>
             <a:r>
-              <a:rPr sz="960" b="1">
-                <a:solidFill>
-                  <a:srgbClr val="0B2239"/>
-                </a:solidFill>
-                <a:latin typeface="맑은 고딕"/>
-                <a:ea typeface="맑은 고딕"/>
-                <a:cs typeface="맑은 고딕"/>
-              </a:rPr>
-              <a:t>D2O</a:t>
+              <a:rPr sz="960" b="0">
+                <a:solidFill>
+                  <a:srgbClr val="243B53"/>
+                </a:solidFill>
+                <a:latin typeface="맑은 고딕"/>
+                <a:ea typeface="맑은 고딕"/>
+                <a:cs typeface="맑은 고딕"/>
+              </a:rPr>
+              <a:t>↳ 운영 직접비 (추정)</a:t>
             </a:r>
           </a:p>
         </p:txBody>
@@ -46709,21 +46761,21 @@
         </p:nvSpPr>
         <p:spPr>
           <a:xfrm>
-            <a:off x="2272095" y="4361688"/>
-            <a:ext cx="1183995" cy="384048"/>
-          </a:xfrm>
-          <a:prstGeom prst="rect">
-            <a:avLst/>
-          </a:prstGeom>
-          <a:noFill/>
-        </p:spPr>
-        <p:txBody>
-          <a:bodyPr wrap="square" anchor="t" lIns="0" rIns="0" tIns="0" bIns="0">
-            <a:spAutoFit/>
-          </a:bodyPr>
-          <a:lstStyle/>
-          <a:p>
-            <a:pPr algn="l">
+            <a:off x="2560096" y="4170680"/>
+            <a:ext cx="665593" cy="336296"/>
+          </a:xfrm>
+          <a:prstGeom prst="rect">
+            <a:avLst/>
+          </a:prstGeom>
+          <a:noFill/>
+        </p:spPr>
+        <p:txBody>
+          <a:bodyPr wrap="square" anchor="t" lIns="0" rIns="0" tIns="0" bIns="0">
+            <a:spAutoFit/>
+          </a:bodyPr>
+          <a:lstStyle/>
+          <a:p>
+            <a:pPr algn="r">
               <a:lnSpc>
                 <a:spcPct val="118000"/>
               </a:lnSpc>
@@ -46732,67 +46784,26 @@
               <a:rPr sz="960" b="0">
                 <a:solidFill>
                   <a:srgbClr val="243B53"/>
-                </a:solidFill>
-                <a:latin typeface="맑은 고딕"/>
-                <a:ea typeface="맑은 고딕"/>
-                <a:cs typeface="맑은 고딕"/>
-              </a:rPr>
-              <a:t>판매 · 플랫폼 · 운영</a:t>
-            </a:r>
-          </a:p>
-        </p:txBody>
-      </p:sp>
-      <p:sp>
-        <p:nvSpPr>
-          <p:cNvPr id="35" name="TextBox 34"/>
-          <p:cNvSpPr txBox="1"/>
-          <p:nvPr/>
-        </p:nvSpPr>
-        <p:spPr>
-          <a:xfrm>
-            <a:off x="3529242" y="4361688"/>
-            <a:ext cx="550393" cy="384048"/>
-          </a:xfrm>
-          <a:prstGeom prst="rect">
-            <a:avLst/>
-          </a:prstGeom>
-          <a:noFill/>
-        </p:spPr>
-        <p:txBody>
-          <a:bodyPr wrap="square" anchor="t" lIns="0" rIns="0" tIns="0" bIns="0">
-            <a:spAutoFit/>
-          </a:bodyPr>
-          <a:lstStyle/>
-          <a:p>
-            <a:pPr algn="r">
-              <a:lnSpc>
-                <a:spcPct val="118000"/>
-              </a:lnSpc>
-            </a:pPr>
-            <a:r>
-              <a:rPr sz="960" b="1">
-                <a:solidFill>
-                  <a:srgbClr val="0B2239"/>
                 </a:solidFill>
                 <a:latin typeface="Consolas"/>
                 <a:ea typeface="Consolas"/>
                 <a:cs typeface="Consolas"/>
               </a:rPr>
-              <a:t>4,300</a:t>
-            </a:r>
-          </a:p>
-        </p:txBody>
-      </p:sp>
-      <p:sp>
-        <p:nvSpPr>
-          <p:cNvPr id="36" name="TextBox 35"/>
-          <p:cNvSpPr txBox="1"/>
-          <p:nvPr/>
-        </p:nvSpPr>
-        <p:spPr>
-          <a:xfrm>
-            <a:off x="4152787" y="4361688"/>
-            <a:ext cx="550393" cy="384048"/>
+              <a:t>DC · AI · CS · 결제</a:t>
+            </a:r>
+          </a:p>
+        </p:txBody>
+      </p:sp>
+      <p:sp>
+        <p:nvSpPr>
+          <p:cNvPr id="35" name="TextBox 34"/>
+          <p:cNvSpPr txBox="1"/>
+          <p:nvPr/>
+        </p:nvSpPr>
+        <p:spPr>
+          <a:xfrm>
+            <a:off x="3298841" y="4170680"/>
+            <a:ext cx="665593" cy="336296"/>
           </a:xfrm>
           <a:prstGeom prst="rect">
             <a:avLst/>
@@ -46811,15 +46822,56 @@
               </a:lnSpc>
             </a:pPr>
             <a:r>
-              <a:rPr sz="960" b="1">
-                <a:solidFill>
-                  <a:srgbClr val="0B2239"/>
+              <a:rPr sz="960" b="0">
+                <a:solidFill>
+                  <a:srgbClr val="243B53"/>
                 </a:solidFill>
                 <a:latin typeface="Consolas"/>
                 <a:ea typeface="Consolas"/>
                 <a:cs typeface="Consolas"/>
               </a:rPr>
-              <a:t>35.8%</a:t>
+              <a:t>(2,850)</a:t>
+            </a:r>
+          </a:p>
+        </p:txBody>
+      </p:sp>
+      <p:sp>
+        <p:nvSpPr>
+          <p:cNvPr id="36" name="TextBox 35"/>
+          <p:cNvSpPr txBox="1"/>
+          <p:nvPr/>
+        </p:nvSpPr>
+        <p:spPr>
+          <a:xfrm>
+            <a:off x="4037587" y="4170680"/>
+            <a:ext cx="665593" cy="336296"/>
+          </a:xfrm>
+          <a:prstGeom prst="rect">
+            <a:avLst/>
+          </a:prstGeom>
+          <a:noFill/>
+        </p:spPr>
+        <p:txBody>
+          <a:bodyPr wrap="square" anchor="t" lIns="0" rIns="0" tIns="0" bIns="0">
+            <a:spAutoFit/>
+          </a:bodyPr>
+          <a:lstStyle/>
+          <a:p>
+            <a:pPr algn="r">
+              <a:lnSpc>
+                <a:spcPct val="118000"/>
+              </a:lnSpc>
+            </a:pPr>
+            <a:r>
+              <a:rPr sz="960" b="0">
+                <a:solidFill>
+                  <a:srgbClr val="243B53"/>
+                </a:solidFill>
+                <a:latin typeface="Consolas"/>
+                <a:ea typeface="Consolas"/>
+                <a:cs typeface="Consolas"/>
+              </a:rPr>
+              <a:t>23.7%</a:t>
             </a:r>
           </a:p>
         </p:txBody>
@@ -46832,7 +46884,7 @@
         </p:nvCxnSpPr>
         <p:spPr>
           <a:xfrm>
-            <a:off x="713232" y="4709159"/>
+            <a:off x="713232" y="4470400"/>
             <a:ext cx="4063101" cy="0"/>
           </a:xfrm>
           <a:prstGeom prst="bentConnector3">
@@ -46868,8 +46920,8 @@
         </p:nvSpPr>
         <p:spPr>
           <a:xfrm>
-            <a:off x="713232" y="4745736"/>
-            <a:ext cx="1485711" cy="384048"/>
+            <a:off x="713232" y="4506976"/>
+            <a:ext cx="1773712" cy="336296"/>
           </a:xfrm>
           <a:prstGeom prst="rect">
             <a:avLst/>
@@ -46896,7 +46948,7 @@
                 <a:ea typeface="맑은 고딕"/>
                 <a:cs typeface="맑은 고딕"/>
               </a:rPr>
-              <a:t>↳ 운영 직접비 (추정)</a:t>
+              <a:t>↳ 구독 기여이익</a:t>
             </a:r>
           </a:p>
         </p:txBody>
@@ -46909,49 +46961,8 @@
         </p:nvSpPr>
         <p:spPr>
           <a:xfrm>
-            <a:off x="2272095" y="4745736"/>
-            <a:ext cx="1183995" cy="384048"/>
-          </a:xfrm>
-          <a:prstGeom prst="rect">
-            <a:avLst/>
-          </a:prstGeom>
-          <a:noFill/>
-        </p:spPr>
-        <p:txBody>
-          <a:bodyPr wrap="square" anchor="t" lIns="0" rIns="0" tIns="0" bIns="0">
-            <a:spAutoFit/>
-          </a:bodyPr>
-          <a:lstStyle/>
-          <a:p>
-            <a:pPr algn="l">
-              <a:lnSpc>
-                <a:spcPct val="118000"/>
-              </a:lnSpc>
-            </a:pPr>
-            <a:r>
-              <a:rPr sz="960" b="0">
-                <a:solidFill>
-                  <a:srgbClr val="243B53"/>
-                </a:solidFill>
-                <a:latin typeface="맑은 고딕"/>
-                <a:ea typeface="맑은 고딕"/>
-                <a:cs typeface="맑은 고딕"/>
-              </a:rPr>
-              <a:t>DC · AI · CS · 결제</a:t>
-            </a:r>
-          </a:p>
-        </p:txBody>
-      </p:sp>
-      <p:sp>
-        <p:nvSpPr>
-          <p:cNvPr id="40" name="TextBox 39"/>
-          <p:cNvSpPr txBox="1"/>
-          <p:nvPr/>
-        </p:nvSpPr>
-        <p:spPr>
-          <a:xfrm>
-            <a:off x="3529242" y="4745736"/>
-            <a:ext cx="550393" cy="384048"/>
+            <a:off x="2560096" y="4506976"/>
+            <a:ext cx="665593" cy="336296"/>
           </a:xfrm>
           <a:prstGeom prst="rect">
             <a:avLst/>
@@ -46978,21 +46989,21 @@
                 <a:ea typeface="Consolas"/>
                 <a:cs typeface="Consolas"/>
               </a:rPr>
-              <a:t>(2,850)</a:t>
-            </a:r>
-          </a:p>
-        </p:txBody>
-      </p:sp>
-      <p:sp>
-        <p:nvSpPr>
-          <p:cNvPr id="41" name="TextBox 40"/>
-          <p:cNvSpPr txBox="1"/>
-          <p:nvPr/>
-        </p:nvSpPr>
-        <p:spPr>
-          <a:xfrm>
-            <a:off x="4152787" y="4745736"/>
-            <a:ext cx="550393" cy="384048"/>
+              <a:t/>
+            </a:r>
+          </a:p>
+        </p:txBody>
+      </p:sp>
+      <p:sp>
+        <p:nvSpPr>
+          <p:cNvPr id="40" name="TextBox 39"/>
+          <p:cNvSpPr txBox="1"/>
+          <p:nvPr/>
+        </p:nvSpPr>
+        <p:spPr>
+          <a:xfrm>
+            <a:off x="3298841" y="4506976"/>
+            <a:ext cx="665593" cy="336296"/>
           </a:xfrm>
           <a:prstGeom prst="rect">
             <a:avLst/>
@@ -47019,7 +47030,48 @@
                 <a:ea typeface="Consolas"/>
                 <a:cs typeface="Consolas"/>
               </a:rPr>
-              <a:t>23.7%</a:t>
+              <a:t>1,450</a:t>
+            </a:r>
+          </a:p>
+        </p:txBody>
+      </p:sp>
+      <p:sp>
+        <p:nvSpPr>
+          <p:cNvPr id="41" name="TextBox 40"/>
+          <p:cNvSpPr txBox="1"/>
+          <p:nvPr/>
+        </p:nvSpPr>
+        <p:spPr>
+          <a:xfrm>
+            <a:off x="4037587" y="4506976"/>
+            <a:ext cx="665593" cy="336296"/>
+          </a:xfrm>
+          <a:prstGeom prst="rect">
+            <a:avLst/>
+          </a:prstGeom>
+          <a:noFill/>
+        </p:spPr>
+        <p:txBody>
+          <a:bodyPr wrap="square" anchor="t" lIns="0" rIns="0" tIns="0" bIns="0">
+            <a:spAutoFit/>
+          </a:bodyPr>
+          <a:lstStyle/>
+          <a:p>
+            <a:pPr algn="r">
+              <a:lnSpc>
+                <a:spcPct val="118000"/>
+              </a:lnSpc>
+            </a:pPr>
+            <a:r>
+              <a:rPr sz="960" b="0">
+                <a:solidFill>
+                  <a:srgbClr val="243B53"/>
+                </a:solidFill>
+                <a:latin typeface="Consolas"/>
+                <a:ea typeface="Consolas"/>
+                <a:cs typeface="Consolas"/>
+              </a:rPr>
+              <a:t>12.1%</a:t>
             </a:r>
           </a:p>
         </p:txBody>
@@ -47032,7 +47084,7 @@
         </p:nvCxnSpPr>
         <p:spPr>
           <a:xfrm>
-            <a:off x="713232" y="5093207"/>
+            <a:off x="713232" y="4806695"/>
             <a:ext cx="4063101" cy="0"/>
           </a:xfrm>
           <a:prstGeom prst="bentConnector3">
@@ -47068,8 +47120,8 @@
         </p:nvSpPr>
         <p:spPr>
           <a:xfrm>
-            <a:off x="713232" y="5129783"/>
-            <a:ext cx="1485711" cy="384048"/>
+            <a:off x="713232" y="4843271"/>
+            <a:ext cx="1773712" cy="336296"/>
           </a:xfrm>
           <a:prstGeom prst="rect">
             <a:avLst/>
@@ -47088,15 +47140,15 @@
               </a:lnSpc>
             </a:pPr>
             <a:r>
-              <a:rPr sz="960" b="1">
-                <a:solidFill>
-                  <a:srgbClr val="0B2239"/>
-                </a:solidFill>
-                <a:latin typeface="맑은 고딕"/>
-                <a:ea typeface="맑은 고딕"/>
-                <a:cs typeface="맑은 고딕"/>
-              </a:rPr>
-              <a:t>D2O 기여이익</a:t>
+              <a:rPr sz="960" b="0">
+                <a:solidFill>
+                  <a:srgbClr val="243B53"/>
+                </a:solidFill>
+                <a:latin typeface="맑은 고딕"/>
+                <a:ea typeface="맑은 고딕"/>
+                <a:cs typeface="맑은 고딕"/>
+              </a:rPr>
+              <a:t>↳ 설치 마진 환산 (70두·4년)</a:t>
             </a:r>
           </a:p>
         </p:txBody>
@@ -47109,90 +47161,49 @@
         </p:nvSpPr>
         <p:spPr>
           <a:xfrm>
-            <a:off x="2272095" y="5129783"/>
-            <a:ext cx="1183995" cy="384048"/>
-          </a:xfrm>
-          <a:prstGeom prst="rect">
-            <a:avLst/>
-          </a:prstGeom>
-          <a:noFill/>
-        </p:spPr>
-        <p:txBody>
-          <a:bodyPr wrap="square" anchor="t" lIns="0" rIns="0" tIns="0" bIns="0">
-            <a:spAutoFit/>
-          </a:bodyPr>
-          <a:lstStyle/>
-          <a:p>
-            <a:pPr algn="l">
+            <a:off x="2560096" y="4843271"/>
+            <a:ext cx="665593" cy="336296"/>
+          </a:xfrm>
+          <a:prstGeom prst="rect">
+            <a:avLst/>
+          </a:prstGeom>
+          <a:noFill/>
+        </p:spPr>
+        <p:txBody>
+          <a:bodyPr wrap="square" anchor="t" lIns="0" rIns="0" tIns="0" bIns="0">
+            <a:spAutoFit/>
+          </a:bodyPr>
+          <a:lstStyle/>
+          <a:p>
+            <a:pPr algn="r">
               <a:lnSpc>
                 <a:spcPct val="118000"/>
               </a:lnSpc>
             </a:pPr>
             <a:r>
-              <a:rPr sz="960" b="1">
-                <a:solidFill>
-                  <a:srgbClr val="0B2239"/>
-                </a:solidFill>
-                <a:latin typeface="맑은 고딕"/>
-                <a:ea typeface="맑은 고딕"/>
-                <a:cs typeface="맑은 고딕"/>
-              </a:rPr>
-              <a:t/>
-            </a:r>
-          </a:p>
-        </p:txBody>
-      </p:sp>
-      <p:sp>
-        <p:nvSpPr>
-          <p:cNvPr id="45" name="TextBox 44"/>
-          <p:cNvSpPr txBox="1"/>
-          <p:nvPr/>
-        </p:nvSpPr>
-        <p:spPr>
-          <a:xfrm>
-            <a:off x="3529242" y="5129783"/>
-            <a:ext cx="550393" cy="384048"/>
-          </a:xfrm>
-          <a:prstGeom prst="rect">
-            <a:avLst/>
-          </a:prstGeom>
-          <a:noFill/>
-        </p:spPr>
-        <p:txBody>
-          <a:bodyPr wrap="square" anchor="t" lIns="0" rIns="0" tIns="0" bIns="0">
-            <a:spAutoFit/>
-          </a:bodyPr>
-          <a:lstStyle/>
-          <a:p>
-            <a:pPr algn="r">
-              <a:lnSpc>
-                <a:spcPct val="118000"/>
-              </a:lnSpc>
-            </a:pPr>
-            <a:r>
-              <a:rPr sz="960" b="1">
-                <a:solidFill>
-                  <a:srgbClr val="0B2239"/>
+              <a:rPr sz="960" b="0">
+                <a:solidFill>
+                  <a:srgbClr val="243B53"/>
                 </a:solidFill>
                 <a:latin typeface="Consolas"/>
                 <a:ea typeface="Consolas"/>
                 <a:cs typeface="Consolas"/>
               </a:rPr>
-              <a:t>1,450</a:t>
-            </a:r>
-          </a:p>
-        </p:txBody>
-      </p:sp>
-      <p:sp>
-        <p:nvSpPr>
-          <p:cNvPr id="46" name="TextBox 45"/>
-          <p:cNvSpPr txBox="1"/>
-          <p:nvPr/>
-        </p:nvSpPr>
-        <p:spPr>
-          <a:xfrm>
-            <a:off x="4152787" y="5129783"/>
-            <a:ext cx="550393" cy="384048"/>
+              <a:t>목장당 250만 ÷ 70두 ÷ 48개월</a:t>
+            </a:r>
+          </a:p>
+        </p:txBody>
+      </p:sp>
+      <p:sp>
+        <p:nvSpPr>
+          <p:cNvPr id="45" name="TextBox 44"/>
+          <p:cNvSpPr txBox="1"/>
+          <p:nvPr/>
+        </p:nvSpPr>
+        <p:spPr>
+          <a:xfrm>
+            <a:off x="3298841" y="4843271"/>
+            <a:ext cx="665593" cy="336296"/>
           </a:xfrm>
           <a:prstGeom prst="rect">
             <a:avLst/>
@@ -47211,15 +47222,56 @@
               </a:lnSpc>
             </a:pPr>
             <a:r>
-              <a:rPr sz="960" b="1">
-                <a:solidFill>
-                  <a:srgbClr val="0B2239"/>
+              <a:rPr sz="960" b="0">
+                <a:solidFill>
+                  <a:srgbClr val="243B53"/>
                 </a:solidFill>
                 <a:latin typeface="Consolas"/>
                 <a:ea typeface="Consolas"/>
                 <a:cs typeface="Consolas"/>
               </a:rPr>
-              <a:t>12.1%</a:t>
+              <a:t>+744</a:t>
+            </a:r>
+          </a:p>
+        </p:txBody>
+      </p:sp>
+      <p:sp>
+        <p:nvSpPr>
+          <p:cNvPr id="46" name="TextBox 45"/>
+          <p:cNvSpPr txBox="1"/>
+          <p:nvPr/>
+        </p:nvSpPr>
+        <p:spPr>
+          <a:xfrm>
+            <a:off x="4037587" y="4843271"/>
+            <a:ext cx="665593" cy="336296"/>
+          </a:xfrm>
+          <a:prstGeom prst="rect">
+            <a:avLst/>
+          </a:prstGeom>
+          <a:noFill/>
+        </p:spPr>
+        <p:txBody>
+          <a:bodyPr wrap="square" anchor="t" lIns="0" rIns="0" tIns="0" bIns="0">
+            <a:spAutoFit/>
+          </a:bodyPr>
+          <a:lstStyle/>
+          <a:p>
+            <a:pPr algn="r">
+              <a:lnSpc>
+                <a:spcPct val="118000"/>
+              </a:lnSpc>
+            </a:pPr>
+            <a:r>
+              <a:rPr sz="960" b="0">
+                <a:solidFill>
+                  <a:srgbClr val="243B53"/>
+                </a:solidFill>
+                <a:latin typeface="Consolas"/>
+                <a:ea typeface="Consolas"/>
+                <a:cs typeface="Consolas"/>
+              </a:rPr>
+              <a:t/>
             </a:r>
           </a:p>
         </p:txBody>
@@ -47232,7 +47284,207 @@
         </p:nvCxnSpPr>
         <p:spPr>
           <a:xfrm>
-            <a:off x="713232" y="5477255"/>
+            <a:off x="713232" y="5142991"/>
+            <a:ext cx="4063101" cy="0"/>
+          </a:xfrm>
+          <a:prstGeom prst="bentConnector3">
+            <a:avLst/>
+          </a:prstGeom>
+          <a:ln w="7620">
+            <a:solidFill>
+              <a:srgbClr val="D6E0E4"/>
+            </a:solidFill>
+          </a:ln>
+          <a:effectLst/>
+        </p:spPr>
+        <p:style>
+          <a:lnRef idx="2">
+            <a:schemeClr val="accent1"/>
+          </a:lnRef>
+          <a:fillRef idx="0">
+            <a:schemeClr val="accent1"/>
+          </a:fillRef>
+          <a:effectRef idx="1">
+            <a:schemeClr val="accent1"/>
+          </a:effectRef>
+          <a:fontRef idx="minor">
+            <a:schemeClr val="tx1"/>
+          </a:fontRef>
+        </p:style>
+      </p:cxnSp>
+      <p:sp>
+        <p:nvSpPr>
+          <p:cNvPr id="48" name="TextBox 47"/>
+          <p:cNvSpPr txBox="1"/>
+          <p:nvPr/>
+        </p:nvSpPr>
+        <p:spPr>
+          <a:xfrm>
+            <a:off x="713232" y="5179567"/>
+            <a:ext cx="1773712" cy="336296"/>
+          </a:xfrm>
+          <a:prstGeom prst="rect">
+            <a:avLst/>
+          </a:prstGeom>
+          <a:noFill/>
+        </p:spPr>
+        <p:txBody>
+          <a:bodyPr wrap="square" anchor="t" lIns="0" rIns="0" tIns="0" bIns="0">
+            <a:spAutoFit/>
+          </a:bodyPr>
+          <a:lstStyle/>
+          <a:p>
+            <a:pPr algn="l">
+              <a:lnSpc>
+                <a:spcPct val="118000"/>
+              </a:lnSpc>
+            </a:pPr>
+            <a:r>
+              <a:rPr sz="960" b="1">
+                <a:solidFill>
+                  <a:srgbClr val="0B2239"/>
+                </a:solidFill>
+                <a:latin typeface="맑은 고딕"/>
+                <a:ea typeface="맑은 고딕"/>
+                <a:cs typeface="맑은 고딕"/>
+              </a:rPr>
+              <a:t>D2O 통합 기여이익</a:t>
+            </a:r>
+          </a:p>
+        </p:txBody>
+      </p:sp>
+      <p:sp>
+        <p:nvSpPr>
+          <p:cNvPr id="49" name="TextBox 48"/>
+          <p:cNvSpPr txBox="1"/>
+          <p:nvPr/>
+        </p:nvSpPr>
+        <p:spPr>
+          <a:xfrm>
+            <a:off x="2560096" y="5179567"/>
+            <a:ext cx="665593" cy="336296"/>
+          </a:xfrm>
+          <a:prstGeom prst="rect">
+            <a:avLst/>
+          </a:prstGeom>
+          <a:noFill/>
+        </p:spPr>
+        <p:txBody>
+          <a:bodyPr wrap="square" anchor="t" lIns="0" rIns="0" tIns="0" bIns="0">
+            <a:spAutoFit/>
+          </a:bodyPr>
+          <a:lstStyle/>
+          <a:p>
+            <a:pPr algn="r">
+              <a:lnSpc>
+                <a:spcPct val="118000"/>
+              </a:lnSpc>
+            </a:pPr>
+            <a:r>
+              <a:rPr sz="960" b="1">
+                <a:solidFill>
+                  <a:srgbClr val="0B2239"/>
+                </a:solidFill>
+                <a:latin typeface="Consolas"/>
+                <a:ea typeface="Consolas"/>
+                <a:cs typeface="Consolas"/>
+              </a:rPr>
+              <a:t/>
+            </a:r>
+          </a:p>
+        </p:txBody>
+      </p:sp>
+      <p:sp>
+        <p:nvSpPr>
+          <p:cNvPr id="50" name="TextBox 49"/>
+          <p:cNvSpPr txBox="1"/>
+          <p:nvPr/>
+        </p:nvSpPr>
+        <p:spPr>
+          <a:xfrm>
+            <a:off x="3298841" y="5179567"/>
+            <a:ext cx="665593" cy="336296"/>
+          </a:xfrm>
+          <a:prstGeom prst="rect">
+            <a:avLst/>
+          </a:prstGeom>
+          <a:noFill/>
+        </p:spPr>
+        <p:txBody>
+          <a:bodyPr wrap="square" anchor="t" lIns="0" rIns="0" tIns="0" bIns="0">
+            <a:spAutoFit/>
+          </a:bodyPr>
+          <a:lstStyle/>
+          <a:p>
+            <a:pPr algn="r">
+              <a:lnSpc>
+                <a:spcPct val="118000"/>
+              </a:lnSpc>
+            </a:pPr>
+            <a:r>
+              <a:rPr sz="960" b="1">
+                <a:solidFill>
+                  <a:srgbClr val="0B2239"/>
+                </a:solidFill>
+                <a:latin typeface="Consolas"/>
+                <a:ea typeface="Consolas"/>
+                <a:cs typeface="Consolas"/>
+              </a:rPr>
+              <a:t>2,194</a:t>
+            </a:r>
+          </a:p>
+        </p:txBody>
+      </p:sp>
+      <p:sp>
+        <p:nvSpPr>
+          <p:cNvPr id="51" name="TextBox 50"/>
+          <p:cNvSpPr txBox="1"/>
+          <p:nvPr/>
+        </p:nvSpPr>
+        <p:spPr>
+          <a:xfrm>
+            <a:off x="4037587" y="5179567"/>
+            <a:ext cx="665593" cy="336296"/>
+          </a:xfrm>
+          <a:prstGeom prst="rect">
+            <a:avLst/>
+          </a:prstGeom>
+          <a:noFill/>
+        </p:spPr>
+        <p:txBody>
+          <a:bodyPr wrap="square" anchor="t" lIns="0" rIns="0" tIns="0" bIns="0">
+            <a:spAutoFit/>
+          </a:bodyPr>
+          <a:lstStyle/>
+          <a:p>
+            <a:pPr algn="r">
+              <a:lnSpc>
+                <a:spcPct val="118000"/>
+              </a:lnSpc>
+            </a:pPr>
+            <a:r>
+              <a:rPr sz="960" b="1">
+                <a:solidFill>
+                  <a:srgbClr val="0B2239"/>
+                </a:solidFill>
+                <a:latin typeface="Consolas"/>
+                <a:ea typeface="Consolas"/>
+                <a:cs typeface="Consolas"/>
+              </a:rPr>
+              <a:t>16.3%</a:t>
+            </a:r>
+          </a:p>
+        </p:txBody>
+      </p:sp>
+      <p:cxnSp>
+        <p:nvCxnSpPr>
+          <p:cNvPr id="52" name="Connector 51"/>
+          <p:cNvCxnSpPr/>
+          <p:nvPr/>
+        </p:nvCxnSpPr>
+        <p:spPr>
+          <a:xfrm>
+            <a:off x="713232" y="5479287"/>
             <a:ext cx="4063101" cy="0"/>
           </a:xfrm>
           <a:prstGeom prst="bentConnector3">
@@ -47262,14 +47514,184 @@
       </p:cxnSp>
       <p:sp>
         <p:nvSpPr>
-          <p:cNvPr id="48" name="Rectangle 47"/>
+          <p:cNvPr id="53" name="TextBox 52"/>
+          <p:cNvSpPr txBox="1"/>
+          <p:nvPr/>
+        </p:nvSpPr>
+        <p:spPr>
+          <a:xfrm>
+            <a:off x="713232" y="5515863"/>
+            <a:ext cx="1773712" cy="336296"/>
+          </a:xfrm>
+          <a:prstGeom prst="rect">
+            <a:avLst/>
+          </a:prstGeom>
+          <a:noFill/>
+        </p:spPr>
+        <p:txBody>
+          <a:bodyPr wrap="square" anchor="t" lIns="0" rIns="0" tIns="0" bIns="0">
+            <a:spAutoFit/>
+          </a:bodyPr>
+          <a:lstStyle/>
+          <a:p>
+            <a:pPr algn="l">
+              <a:lnSpc>
+                <a:spcPct val="118000"/>
+              </a:lnSpc>
+            </a:pPr>
+            <a:r>
+              <a:rPr sz="960" b="1">
+                <a:solidFill>
+                  <a:srgbClr val="0B2239"/>
+                </a:solidFill>
+                <a:latin typeface="맑은 고딕"/>
+                <a:ea typeface="맑은 고딕"/>
+                <a:cs typeface="맑은 고딕"/>
+              </a:rPr>
+              <a:t>손익분기</a:t>
+            </a:r>
+            <a:r>
+              <a:rPr sz="960" b="0">
+                <a:solidFill>
+                  <a:srgbClr val="243B53"/>
+                </a:solidFill>
+                <a:latin typeface="맑은 고딕"/>
+                <a:ea typeface="맑은 고딕"/>
+                <a:cs typeface="맑은 고딕"/>
+              </a:rPr>
+              <a:t> — 1인 체제(고정비 1.2억)</a:t>
+            </a:r>
+          </a:p>
+        </p:txBody>
+      </p:sp>
+      <p:sp>
+        <p:nvSpPr>
+          <p:cNvPr id="54" name="TextBox 53"/>
+          <p:cNvSpPr txBox="1"/>
+          <p:nvPr/>
+        </p:nvSpPr>
+        <p:spPr>
+          <a:xfrm>
+            <a:off x="2560096" y="5515863"/>
+            <a:ext cx="665593" cy="336296"/>
+          </a:xfrm>
+          <a:prstGeom prst="rect">
+            <a:avLst/>
+          </a:prstGeom>
+          <a:noFill/>
+        </p:spPr>
+        <p:txBody>
+          <a:bodyPr wrap="square" anchor="t" lIns="0" rIns="0" tIns="0" bIns="0">
+            <a:spAutoFit/>
+          </a:bodyPr>
+          <a:lstStyle/>
+          <a:p>
+            <a:pPr algn="r">
+              <a:lnSpc>
+                <a:spcPct val="118000"/>
+              </a:lnSpc>
+            </a:pPr>
+            <a:r>
+              <a:rPr sz="960" b="1">
+                <a:solidFill>
+                  <a:srgbClr val="0B2239"/>
+                </a:solidFill>
+                <a:latin typeface="Consolas"/>
+                <a:ea typeface="Consolas"/>
+                <a:cs typeface="Consolas"/>
+              </a:rPr>
+              <a:t>약 4,600두</a:t>
+            </a:r>
+          </a:p>
+        </p:txBody>
+      </p:sp>
+      <p:sp>
+        <p:nvSpPr>
+          <p:cNvPr id="55" name="TextBox 54"/>
+          <p:cNvSpPr txBox="1"/>
+          <p:nvPr/>
+        </p:nvSpPr>
+        <p:spPr>
+          <a:xfrm>
+            <a:off x="3298841" y="5515863"/>
+            <a:ext cx="665593" cy="336296"/>
+          </a:xfrm>
+          <a:prstGeom prst="rect">
+            <a:avLst/>
+          </a:prstGeom>
+          <a:noFill/>
+        </p:spPr>
+        <p:txBody>
+          <a:bodyPr wrap="square" anchor="t" lIns="0" rIns="0" tIns="0" bIns="0">
+            <a:spAutoFit/>
+          </a:bodyPr>
+          <a:lstStyle/>
+          <a:p>
+            <a:pPr algn="r">
+              <a:lnSpc>
+                <a:spcPct val="118000"/>
+              </a:lnSpc>
+            </a:pPr>
+            <a:r>
+              <a:rPr sz="960" b="0">
+                <a:solidFill>
+                  <a:srgbClr val="243B53"/>
+                </a:solidFill>
+                <a:latin typeface="Consolas"/>
+                <a:ea typeface="Consolas"/>
+                <a:cs typeface="Consolas"/>
+              </a:rPr>
+              <a:t>목장 66곳</a:t>
+            </a:r>
+          </a:p>
+        </p:txBody>
+      </p:sp>
+      <p:cxnSp>
+        <p:nvCxnSpPr>
+          <p:cNvPr id="56" name="Connector 55"/>
+          <p:cNvCxnSpPr/>
+          <p:nvPr/>
+        </p:nvCxnSpPr>
+        <p:spPr>
+          <a:xfrm>
+            <a:off x="713232" y="5815583"/>
+            <a:ext cx="4063101" cy="0"/>
+          </a:xfrm>
+          <a:prstGeom prst="bentConnector3">
+            <a:avLst/>
+          </a:prstGeom>
+          <a:ln w="7620">
+            <a:solidFill>
+              <a:srgbClr val="D6E0E4"/>
+            </a:solidFill>
+          </a:ln>
+          <a:effectLst/>
+        </p:spPr>
+        <p:style>
+          <a:lnRef idx="2">
+            <a:schemeClr val="accent1"/>
+          </a:lnRef>
+          <a:fillRef idx="0">
+            <a:schemeClr val="accent1"/>
+          </a:fillRef>
+          <a:effectRef idx="1">
+            <a:schemeClr val="accent1"/>
+          </a:effectRef>
+          <a:fontRef idx="minor">
+            <a:schemeClr val="tx1"/>
+          </a:fontRef>
+        </p:style>
+      </p:cxnSp>
+      <p:sp>
+        <p:nvSpPr>
+          <p:cNvPr id="57" name="Rectangle 56"/>
           <p:cNvSpPr/>
           <p:nvPr/>
         </p:nvSpPr>
         <p:spPr>
           <a:xfrm>
             <a:off x="4977501" y="2468880"/>
-            <a:ext cx="6500961" cy="1591056"/>
+            <a:ext cx="6500961" cy="1005840"/>
           </a:xfrm>
           <a:prstGeom prst="rect">
             <a:avLst/>
@@ -47306,14 +47728,14 @@
       </p:sp>
       <p:sp>
         <p:nvSpPr>
-          <p:cNvPr id="49" name="TextBox 48"/>
+          <p:cNvPr id="58" name="TextBox 57"/>
           <p:cNvSpPr txBox="1"/>
           <p:nvPr/>
         </p:nvSpPr>
         <p:spPr>
           <a:xfrm>
             <a:off x="5160381" y="2651760"/>
-            <a:ext cx="6135201" cy="1225296"/>
+            <a:ext cx="6135201" cy="640080"/>
           </a:xfrm>
           <a:prstGeom prst="rect">
             <a:avLst/>
@@ -47364,7 +47786,8 @@
                 <a:ea typeface="맑은 고딕"/>
                 <a:cs typeface="맑은 고딕"/>
               </a:rPr>
-              <a:t>500만원 / 목장</a:t>
+              <a:t>500만원 − 원가 250만원
+= 마진 250만원 (50%)</a:t>
             </a:r>
           </a:p>
           <a:p>
@@ -47385,7 +47808,7 @@
                 <a:ea typeface="맑은 고딕"/>
                 <a:cs typeface="맑은 고딕"/>
               </a:rPr>
-              <a:t>통신중계기 HW·시공 + </a:t>
+              <a:t>중계기 HW·시공 + </a:t>
             </a:r>
             <a:r>
               <a:rPr sz="980" b="1">
@@ -47396,7 +47819,7 @@
                 <a:ea typeface="맑은 고딕"/>
                 <a:cs typeface="맑은 고딕"/>
               </a:rPr>
-              <a:t>개체 삽입 시술 · 개체 기록 · 시스템 등록</a:t>
+              <a:t>개체 삽입 시술 · 기록 · 등록</a:t>
             </a:r>
             <a:r>
               <a:rPr sz="980" b="0">
@@ -47407,8 +47830,7 @@
                 <a:ea typeface="맑은 고딕"/>
                 <a:cs typeface="맑은 고딕"/>
               </a:rPr>
-              <a:t> 포함.
- </a:t>
+              <a:t> 포함, </a:t>
             </a:r>
             <a:r>
               <a:rPr sz="980" b="1">
@@ -47430,21 +47852,66 @@
                 <a:ea typeface="맑은 고딕"/>
                 <a:cs typeface="맑은 고딕"/>
               </a:rPr>
-              <a:t>이 필요해 원가 부담이 크다 — 권역 일괄 설치로 개선 대상.</a:t>
-            </a:r>
-          </a:p>
-        </p:txBody>
-      </p:sp>
-      <p:sp>
-        <p:nvSpPr>
-          <p:cNvPr id="50" name="Rectangle 49"/>
+              <a:t>.
+ 70두 목장 4년 환산 시 </a:t>
+            </a:r>
+            <a:r>
+              <a:rPr sz="980" b="1">
+                <a:solidFill>
+                  <a:srgbClr val="0B2239"/>
+                </a:solidFill>
+                <a:latin typeface="맑은 고딕"/>
+                <a:ea typeface="맑은 고딕"/>
+                <a:cs typeface="맑은 고딕"/>
+              </a:rPr>
+              <a:t>두당 월 744원</a:t>
+            </a:r>
+            <a:r>
+              <a:rPr sz="980" b="0">
+                <a:solidFill>
+                  <a:srgbClr val="5A6B76"/>
+                </a:solidFill>
+                <a:latin typeface="맑은 고딕"/>
+                <a:ea typeface="맑은 고딕"/>
+                <a:cs typeface="맑은 고딕"/>
+              </a:rPr>
+              <a:t> — 손익분기를 57,500두 → </a:t>
+            </a:r>
+            <a:r>
+              <a:rPr sz="980" b="1">
+                <a:solidFill>
+                  <a:srgbClr val="0B2239"/>
+                </a:solidFill>
+                <a:latin typeface="맑은 고딕"/>
+                <a:ea typeface="맑은 고딕"/>
+                <a:cs typeface="맑은 고딕"/>
+              </a:rPr>
+              <a:t>38,000두</a:t>
+            </a:r>
+            <a:r>
+              <a:rPr sz="980" b="0">
+                <a:solidFill>
+                  <a:srgbClr val="5A6B76"/>
+                </a:solidFill>
+                <a:latin typeface="맑은 고딕"/>
+                <a:ea typeface="맑은 고딕"/>
+                <a:cs typeface="맑은 고딕"/>
+              </a:rPr>
+              <a:t>로 낮춘다.</a:t>
+            </a:r>
+          </a:p>
+        </p:txBody>
+      </p:sp>
+      <p:sp>
+        <p:nvSpPr>
+          <p:cNvPr id="59" name="Rectangle 58"/>
           <p:cNvSpPr/>
           <p:nvPr/>
         </p:nvSpPr>
         <p:spPr>
           <a:xfrm>
-            <a:off x="4977501" y="4224528"/>
-            <a:ext cx="6500961" cy="1591056"/>
+            <a:off x="4977501" y="3639312"/>
+            <a:ext cx="6500961" cy="1005840"/>
           </a:xfrm>
           <a:prstGeom prst="rect">
             <a:avLst/>
@@ -47481,14 +47948,14 @@
       </p:sp>
       <p:sp>
         <p:nvSpPr>
-          <p:cNvPr id="51" name="TextBox 50"/>
-          <p:cNvSpPr txBox="1"/>
-          <p:nvPr/>
-        </p:nvSpPr>
-        <p:spPr>
-          <a:xfrm>
-            <a:off x="5160381" y="4407408"/>
-            <a:ext cx="6135201" cy="1225296"/>
+          <p:cNvPr id="60" name="TextBox 59"/>
+          <p:cNvSpPr txBox="1"/>
+          <p:nvPr/>
+        </p:nvSpPr>
+        <p:spPr>
+          <a:xfrm>
+            <a:off x="5160381" y="3822192"/>
+            <a:ext cx="6135201" cy="640080"/>
           </a:xfrm>
           <a:prstGeom prst="rect">
             <a:avLst/>
@@ -47518,28 +47985,7 @@
                 <a:ea typeface="Consolas"/>
                 <a:cs typeface="Consolas"/>
               </a:rPr>
-              <a:t>가장 중요한 사실</a:t>
-            </a:r>
-          </a:p>
-          <a:p>
-            <a:pPr algn="l">
-              <a:lnSpc>
-                <a:spcPct val="120000"/>
-              </a:lnSpc>
-              <a:spcAft>
-                <a:spcPts val="500"/>
-              </a:spcAft>
-            </a:pPr>
-            <a:r>
-              <a:rPr sz="1250" b="1">
-                <a:solidFill>
-                  <a:srgbClr val="0B2239"/>
-                </a:solidFill>
-                <a:latin typeface="맑은 고딕"/>
-                <a:ea typeface="맑은 고딕"/>
-                <a:cs typeface="맑은 고딕"/>
-              </a:rPr>
-              <a:t>지금까지 전액 목장이 냈다</a:t>
+              <a:t>고정비가 거의 없다</a:t>
             </a:r>
           </a:p>
           <a:p>
@@ -47552,6 +47998,17 @@
               </a:spcAft>
             </a:pPr>
             <a:r>
+              <a:rPr sz="980" b="0">
+                <a:solidFill>
+                  <a:srgbClr val="5A6B76"/>
+                </a:solidFill>
+                <a:latin typeface="맑은 고딕"/>
+                <a:ea typeface="맑은 고딕"/>
+                <a:cs typeface="맑은 고딕"/>
+              </a:rPr>
+              <a:t>데이터센터 </a:t>
+            </a:r>
+            <a:r>
               <a:rPr sz="980" b="1">
                 <a:solidFill>
                   <a:srgbClr val="0B2239"/>
@@ -47560,7 +48017,7 @@
                 <a:ea typeface="맑은 고딕"/>
                 <a:cs typeface="맑은 고딕"/>
               </a:rPr>
-              <a:t>보조금 없이 팔린 제품</a:t>
+              <a:t>외주</a:t>
             </a:r>
             <a:r>
               <a:rPr sz="980" b="0">
@@ -47571,14 +48028,258 @@
                 <a:ea typeface="맑은 고딕"/>
                 <a:cs typeface="맑은 고딕"/>
               </a:rPr>
-              <a:t>이라는 뜻이다. 지자체 심의에서 이보다 강한 시장 검증 증거는 없다.</a:t>
+              <a:t> · 설치 </a:t>
+            </a:r>
+            <a:r>
+              <a:rPr sz="980" b="1">
+                <a:solidFill>
+                  <a:srgbClr val="0B2239"/>
+                </a:solidFill>
+                <a:latin typeface="맑은 고딕"/>
+                <a:ea typeface="맑은 고딕"/>
+                <a:cs typeface="맑은 고딕"/>
+              </a:rPr>
+              <a:t>파트너</a:t>
+            </a:r>
+            <a:r>
+              <a:rPr sz="980" b="0">
+                <a:solidFill>
+                  <a:srgbClr val="5A6B76"/>
+                </a:solidFill>
+                <a:latin typeface="맑은 고딕"/>
+                <a:ea typeface="맑은 고딕"/>
+                <a:cs typeface="맑은 고딕"/>
+              </a:rPr>
+              <a:t> · D2O는 </a:t>
+            </a:r>
+            <a:r>
+              <a:rPr sz="980" b="1">
+                <a:solidFill>
+                  <a:srgbClr val="0B2239"/>
+                </a:solidFill>
+                <a:latin typeface="맑은 고딕"/>
+                <a:ea typeface="맑은 고딕"/>
+                <a:cs typeface="맑은 고딕"/>
+              </a:rPr>
+              <a:t>1인 영업 체제</a:t>
+            </a:r>
+            <a:r>
+              <a:rPr sz="980" b="0">
+                <a:solidFill>
+                  <a:srgbClr val="5A6B76"/>
+                </a:solidFill>
+                <a:latin typeface="맑은 고딕"/>
+                <a:ea typeface="맑은 고딕"/>
+                <a:cs typeface="맑은 고딕"/>
+              </a:rPr>
+              <a:t>.
+ 손익분기 </a:t>
+            </a:r>
+            <a:r>
+              <a:rPr sz="980" b="1">
+                <a:solidFill>
+                  <a:srgbClr val="0B2239"/>
+                </a:solidFill>
+                <a:latin typeface="맑은 고딕"/>
+                <a:ea typeface="맑은 고딕"/>
+                <a:cs typeface="맑은 고딕"/>
+              </a:rPr>
+              <a:t>약 4,600두(목장 66곳)</a:t>
+            </a:r>
+            <a:r>
+              <a:rPr sz="980" b="0">
+                <a:solidFill>
+                  <a:srgbClr val="5A6B76"/>
+                </a:solidFill>
+                <a:latin typeface="맑은 고딕"/>
+                <a:ea typeface="맑은 고딕"/>
+                <a:cs typeface="맑은 고딕"/>
+              </a:rPr>
+              <a:t>. </a:t>
+            </a:r>
+            <a:r>
+              <a:rPr sz="980" b="1">
+                <a:solidFill>
+                  <a:srgbClr val="0B2239"/>
+                </a:solidFill>
+                <a:latin typeface="맑은 고딕"/>
+                <a:ea typeface="맑은 고딕"/>
+                <a:cs typeface="맑은 고딕"/>
+              </a:rPr>
+              <a:t>자본은 제약이 아니다.</a:t>
+            </a:r>
+          </a:p>
+        </p:txBody>
+      </p:sp>
+      <p:sp>
+        <p:nvSpPr>
+          <p:cNvPr id="61" name="Rectangle 60"/>
+          <p:cNvSpPr/>
+          <p:nvPr/>
+        </p:nvSpPr>
+        <p:spPr>
+          <a:xfrm>
+            <a:off x="4977501" y="4809744"/>
+            <a:ext cx="6500961" cy="1005840"/>
+          </a:xfrm>
+          <a:prstGeom prst="rect">
+            <a:avLst/>
+          </a:prstGeom>
+          <a:solidFill>
+            <a:srgbClr val="F5EBDC"/>
+          </a:solidFill>
+          <a:ln w="9525">
+            <a:solidFill>
+              <a:srgbClr val="B06A16"/>
+            </a:solidFill>
+          </a:ln>
+          <a:effectLst/>
+        </p:spPr>
+        <p:style>
+          <a:lnRef idx="1">
+            <a:schemeClr val="accent1"/>
+          </a:lnRef>
+          <a:fillRef idx="3">
+            <a:schemeClr val="accent1"/>
+          </a:fillRef>
+          <a:effectRef idx="2">
+            <a:schemeClr val="accent1"/>
+          </a:effectRef>
+          <a:fontRef idx="minor">
+            <a:schemeClr val="lt1"/>
+          </a:fontRef>
+        </p:style>
+        <p:txBody>
+          <a:bodyPr rtlCol="0" anchor="ctr"/>
+          <a:lstStyle/>
+          <a:p/>
+        </p:txBody>
+      </p:sp>
+      <p:sp>
+        <p:nvSpPr>
+          <p:cNvPr id="62" name="TextBox 61"/>
+          <p:cNvSpPr txBox="1"/>
+          <p:nvPr/>
+        </p:nvSpPr>
+        <p:spPr>
+          <a:xfrm>
+            <a:off x="5160381" y="4992624"/>
+            <a:ext cx="6135201" cy="640080"/>
+          </a:xfrm>
+          <a:prstGeom prst="rect">
+            <a:avLst/>
+          </a:prstGeom>
+          <a:noFill/>
+        </p:spPr>
+        <p:txBody>
+          <a:bodyPr wrap="square" anchor="t" lIns="0" rIns="0" tIns="0" bIns="0">
+            <a:spAutoFit/>
+          </a:bodyPr>
+          <a:lstStyle/>
+          <a:p>
+            <a:pPr algn="l">
+              <a:lnSpc>
+                <a:spcPct val="124000"/>
+              </a:lnSpc>
+              <a:spcAft>
+                <a:spcPts val="400"/>
+              </a:spcAft>
+            </a:pPr>
+            <a:r>
+              <a:rPr sz="800" b="1" spc="120">
+                <a:solidFill>
+                  <a:srgbClr val="B06A16"/>
+                </a:solidFill>
+                <a:latin typeface="Consolas"/>
+                <a:ea typeface="Consolas"/>
+                <a:cs typeface="Consolas"/>
+              </a:rPr>
+              <a:t>⚠️ 진짜 제약</a:t>
+            </a:r>
+          </a:p>
+          <a:p>
+            <a:pPr algn="l">
+              <a:lnSpc>
+                <a:spcPct val="132000"/>
+              </a:lnSpc>
+              <a:spcAft>
+                <a:spcPts val="400"/>
+              </a:spcAft>
+            </a:pPr>
+            <a:r>
+              <a:rPr sz="980" b="1">
+                <a:solidFill>
+                  <a:srgbClr val="0B2239"/>
+                </a:solidFill>
+                <a:latin typeface="맑은 고딕"/>
+                <a:ea typeface="맑은 고딕"/>
+                <a:cs typeface="맑은 고딕"/>
+              </a:rPr>
+              <a:t>실행 역량</a:t>
+            </a:r>
+            <a:r>
+              <a:rPr sz="980" b="0">
+                <a:solidFill>
+                  <a:srgbClr val="5A6B76"/>
+                </a:solidFill>
+                <a:latin typeface="맑은 고딕"/>
+                <a:ea typeface="맑은 고딕"/>
+                <a:cs typeface="맑은 고딕"/>
+              </a:rPr>
+              <a:t> — 3년차엔 하루 6곳을 설치해야 한다.
+ </a:t>
+            </a:r>
+            <a:r>
+              <a:rPr sz="980" b="1">
+                <a:solidFill>
+                  <a:srgbClr val="0B2239"/>
+                </a:solidFill>
+                <a:latin typeface="맑은 고딕"/>
+                <a:ea typeface="맑은 고딕"/>
+                <a:cs typeface="맑은 고딕"/>
+              </a:rPr>
+              <a:t>설치 마진은 성장 연동</a:t>
+            </a:r>
+            <a:r>
+              <a:rPr sz="980" b="0">
+                <a:solidFill>
+                  <a:srgbClr val="5A6B76"/>
+                </a:solidFill>
+                <a:latin typeface="맑은 고딕"/>
+                <a:ea typeface="맑은 고딕"/>
+                <a:cs typeface="맑은 고딕"/>
+              </a:rPr>
+              <a:t> — 신규가 멈추면 0.
+ </a:t>
+            </a:r>
+            <a:r>
+              <a:rPr sz="980" b="1">
+                <a:solidFill>
+                  <a:srgbClr val="0B2239"/>
+                </a:solidFill>
+                <a:latin typeface="맑은 고딕"/>
+                <a:ea typeface="맑은 고딕"/>
+                <a:cs typeface="맑은 고딕"/>
+              </a:rPr>
+              <a:t>재삽입 원가 미계상</a:t>
+            </a:r>
+            <a:r>
+              <a:rPr sz="980" b="0">
+                <a:solidFill>
+                  <a:srgbClr val="5A6B76"/>
+                </a:solidFill>
+                <a:latin typeface="맑은 고딕"/>
+                <a:ea typeface="맑은 고딕"/>
+                <a:cs typeface="맑은 고딕"/>
+              </a:rPr>
+              <a:t> — 도태율 30%면 구독 기여이익의 34%.</a:t>
             </a:r>
           </a:p>
         </p:txBody>
       </p:sp>
       <p:cxnSp>
         <p:nvCxnSpPr>
-          <p:cNvPr id="52" name="Connector 51"/>
+          <p:cNvPr id="63" name="Connector 62"/>
           <p:cNvCxnSpPr/>
           <p:nvPr/>
         </p:nvCxnSpPr>
@@ -47614,7 +48315,7 @@
       </p:cxnSp>
       <p:sp>
         <p:nvSpPr>
-          <p:cNvPr id="53" name="TextBox 52"/>
+          <p:cNvPr id="64" name="TextBox 63"/>
           <p:cNvSpPr txBox="1"/>
           <p:nvPr/>
         </p:nvSpPr>
@@ -47655,7 +48356,7 @@
       </p:sp>
       <p:sp>
         <p:nvSpPr>
-          <p:cNvPr id="54" name="TextBox 53"/>
+          <p:cNvPr id="65" name="TextBox 64"/>
           <p:cNvSpPr txBox="1"/>
           <p:nvPr/>
         </p:nvSpPr>
@@ -47689,7 +48390,7 @@
                 <a:ea typeface="맑은 고딕"/>
                 <a:cs typeface="맑은 고딕"/>
               </a:rPr>
-              <a:t>매출의 </a:t>
+              <a:t>하드웨어가 없으니 </a:t>
             </a:r>
             <a:r>
               <a:rPr sz="1019" b="1">
@@ -47700,7 +48401,7 @@
                 <a:ea typeface="맑은 고딕"/>
                 <a:cs typeface="맑은 고딕"/>
               </a:rPr>
-              <a:t>64.2%가 수입 단가</a:t>
+              <a:t>협상할 것은 구독료 하나뿐</a:t>
             </a:r>
             <a:r>
               <a:rPr sz="1019" b="0">
@@ -47711,7 +48412,7 @@
                 <a:ea typeface="맑은 고딕"/>
                 <a:cs typeface="맑은 고딕"/>
               </a:rPr>
-              <a:t>다. </a:t>
+              <a:t>이다. </a:t>
             </a:r>
             <a:r>
               <a:rPr sz="1019" b="1">
@@ -47722,7 +48423,7 @@
                 <a:ea typeface="맑은 고딕"/>
                 <a:cs typeface="맑은 고딕"/>
               </a:rPr>
-              <a:t>볼륨 구간별 단가 테이블</a:t>
+              <a:t>볼륨 구간별 인하 조항</a:t>
             </a:r>
             <a:r>
               <a:rPr sz="1019" b="0">
@@ -47733,14 +48434,36 @@
                 <a:ea typeface="맑은 고딕"/>
                 <a:cs typeface="맑은 고딕"/>
               </a:rPr>
-              <a:t>이 계약에 없으면 두수가 늘어도 규모의 이점이 D2O에 오지 않는다.</a:t>
-            </a:r>
-          </a:p>
-        </p:txBody>
-      </p:sp>
-      <p:sp>
-        <p:nvSpPr>
-          <p:cNvPr id="55" name="TextBox 54"/>
+              <a:t>과 </a:t>
+            </a:r>
+            <a:r>
+              <a:rPr sz="1019" b="1">
+                <a:solidFill>
+                  <a:srgbClr val="0B2239"/>
+                </a:solidFill>
+                <a:latin typeface="맑은 고딕"/>
+                <a:ea typeface="맑은 고딕"/>
+                <a:cs typeface="맑은 고딕"/>
+              </a:rPr>
+              <a:t>해지 시 설치 센서 처리 조건</a:t>
+            </a:r>
+            <a:r>
+              <a:rPr sz="1019" b="0">
+                <a:solidFill>
+                  <a:srgbClr val="243B53"/>
+                </a:solidFill>
+                <a:latin typeface="맑은 고딕"/>
+                <a:ea typeface="맑은 고딕"/>
+                <a:cs typeface="맑은 고딕"/>
+              </a:rPr>
+              <a:t> — 이 둘이 계약의 전부다.</a:t>
+            </a:r>
+          </a:p>
+        </p:txBody>
+      </p:sp>
+      <p:sp>
+        <p:nvSpPr>
+          <p:cNvPr id="66" name="TextBox 65"/>
           <p:cNvSpPr txBox="1"/>
           <p:nvPr/>
         </p:nvSpPr>

--- a/docs/gtm/deck/CowTalk_GTM_Deck.pptx
+++ b/docs/gtm/deck/CowTalk_GTM_Deck.pptx
@@ -2959,12 +2959,32 @@
           </a:p>
           <a:p>
             <a:r>
-              <a:t>성장 시나리오: 3년차 80,000두 기준 매출 150.9억, 기여이익 31.78억,</a:t>
-            </a:r>
-          </a:p>
-          <a:p>
-            <a:r>
-              <a:t>고정비 5억(5~6인) 차감 시 영업이익 26.78억. 1년차도 +1.46억으로 흑자다.</a:t>
+              <a:t>성장 시나리오: 1년차 +1.56억 / 2년차 +14.35억 / 3년차 +35.28억 (영업이익).</a:t>
+            </a:r>
+          </a:p>
+          <a:p>
+            <a:r>
+              <a:t>고정비는 현장 CS 1인당 12,000두 규칙으로 계단식으로 붙는다 — CS 1명(연 5천만)이</a:t>
+            </a:r>
+          </a:p>
+          <a:p>
+            <a:r>
+              <a:t>커버하는 12,000두의 구독 공헌이익이 연 3.53억이라 계단이 부담되지 않는다.</a:t>
+            </a:r>
+          </a:p>
+          <a:p>
+            <a:r>
+              <a:t>볼륨 ↔ 채널 순서: 지금 채널을 붙이면 2,450원에서 수수료를 빼야 한다.</a:t>
+            </a:r>
+          </a:p>
+          <a:p>
+            <a:r>
+              <a:t>먼저 볼륨을 만들고 → 단가를 10% 낮춰 800원을 확보하고 → 그것을 채널에 준다.</a:t>
+            </a:r>
+          </a:p>
+          <a:p>
+            <a:r>
+              <a:t>순서를 뒤집으면 수수료가 그대로 손실이 된다.</a:t>
             </a:r>
           </a:p>
           <a:p>
@@ -46748,7 +46768,7 @@
                 <a:ea typeface="맑은 고딕"/>
                 <a:cs typeface="맑은 고딕"/>
               </a:rPr>
-              <a:t>↳ 운영 직접비 (추정)</a:t>
+              <a:t>↳ 변동비 (추정)</a:t>
             </a:r>
           </a:p>
         </p:txBody>
@@ -46789,7 +46809,7 @@
                 <a:ea typeface="Consolas"/>
                 <a:cs typeface="Consolas"/>
               </a:rPr>
-              <a:t>DC · AI · CS · 결제</a:t>
+              <a:t>DC · AI · 알림/결제</a:t>
             </a:r>
           </a:p>
         </p:txBody>
@@ -46830,7 +46850,7 @@
                 <a:ea typeface="Consolas"/>
                 <a:cs typeface="Consolas"/>
               </a:rPr>
-              <a:t>(2,850)</a:t>
+              <a:t>(1,850)</a:t>
             </a:r>
           </a:p>
         </p:txBody>
@@ -46871,7 +46891,7 @@
                 <a:ea typeface="Consolas"/>
                 <a:cs typeface="Consolas"/>
               </a:rPr>
-              <a:t>23.7%</a:t>
+              <a:t>15.4%</a:t>
             </a:r>
           </a:p>
         </p:txBody>
@@ -46948,7 +46968,7 @@
                 <a:ea typeface="맑은 고딕"/>
                 <a:cs typeface="맑은 고딕"/>
               </a:rPr>
-              <a:t>↳ 구독 기여이익</a:t>
+              <a:t>↳ 구독 공헌이익</a:t>
             </a:r>
           </a:p>
         </p:txBody>
@@ -47030,7 +47050,7 @@
                 <a:ea typeface="Consolas"/>
                 <a:cs typeface="Consolas"/>
               </a:rPr>
-              <a:t>1,450</a:t>
+              <a:t>2,450</a:t>
             </a:r>
           </a:p>
         </p:txBody>
@@ -47071,7 +47091,7 @@
                 <a:ea typeface="Consolas"/>
                 <a:cs typeface="Consolas"/>
               </a:rPr>
-              <a:t>12.1%</a:t>
+              <a:t>20.4%</a:t>
             </a:r>
           </a:p>
         </p:txBody>
@@ -47348,7 +47368,7 @@
                 <a:ea typeface="맑은 고딕"/>
                 <a:cs typeface="맑은 고딕"/>
               </a:rPr>
-              <a:t>D2O 통합 기여이익</a:t>
+              <a:t>D2O 통합 공헌이익</a:t>
             </a:r>
           </a:p>
         </p:txBody>
@@ -47430,7 +47450,7 @@
                 <a:ea typeface="Consolas"/>
                 <a:cs typeface="Consolas"/>
               </a:rPr>
-              <a:t>2,194</a:t>
+              <a:t>3,194</a:t>
             </a:r>
           </a:p>
         </p:txBody>
@@ -47471,7 +47491,7 @@
                 <a:ea typeface="Consolas"/>
                 <a:cs typeface="Consolas"/>
               </a:rPr>
-              <a:t>16.3%</a:t>
+              <a:t>26.6%</a:t>
             </a:r>
           </a:p>
         </p:txBody>
@@ -47559,7 +47579,7 @@
                 <a:ea typeface="맑은 고딕"/>
                 <a:cs typeface="맑은 고딕"/>
               </a:rPr>
-              <a:t> — 1인 체제(고정비 1.2억)</a:t>
+              <a:t> — 기술이사 1인 + 현장 CS 1명 (1.7억)</a:t>
             </a:r>
           </a:p>
         </p:txBody>
@@ -47600,7 +47620,7 @@
                 <a:ea typeface="Consolas"/>
                 <a:cs typeface="Consolas"/>
               </a:rPr>
-              <a:t>약 4,600두</a:t>
+              <a:t>약 4,400두</a:t>
             </a:r>
           </a:p>
         </p:txBody>
@@ -47641,7 +47661,7 @@
                 <a:ea typeface="Consolas"/>
                 <a:cs typeface="Consolas"/>
               </a:rPr>
-              <a:t>목장 66곳</a:t>
+              <a:t>목장 63곳</a:t>
             </a:r>
           </a:p>
         </p:txBody>
@@ -47985,7 +48005,7 @@
                 <a:ea typeface="Consolas"/>
                 <a:cs typeface="Consolas"/>
               </a:rPr>
-              <a:t>고정비가 거의 없다</a:t>
+              <a:t>ASSET-LIGHT 구조</a:t>
             </a:r>
           </a:p>
           <a:p>
@@ -48061,7 +48081,7 @@
                 <a:ea typeface="맑은 고딕"/>
                 <a:cs typeface="맑은 고딕"/>
               </a:rPr>
-              <a:t>1인 영업 체제</a:t>
+              <a:t>영업·교육·플랫폼</a:t>
             </a:r>
             <a:r>
               <a:rPr sz="980" b="0">
@@ -48073,7 +48093,7 @@
                 <a:cs typeface="맑은 고딕"/>
               </a:rPr>
               <a:t>.
- 손익분기 </a:t>
+ 1년차 5,000두에서 이미 </a:t>
             </a:r>
             <a:r>
               <a:rPr sz="980" b="1">
@@ -48084,7 +48104,7 @@
                 <a:ea typeface="맑은 고딕"/>
                 <a:cs typeface="맑은 고딕"/>
               </a:rPr>
-              <a:t>약 4,600두(목장 66곳)</a:t>
+              <a:t>영업이익 +1.56억</a:t>
             </a:r>
             <a:r>
               <a:rPr sz="980" b="0">
@@ -48107,6 +48127,50 @@
                 <a:cs typeface="맑은 고딕"/>
               </a:rPr>
               <a:t>자본은 제약이 아니다.</a:t>
+            </a:r>
+          </a:p>
+          <a:p>
+            <a:pPr algn="l">
+              <a:lnSpc>
+                <a:spcPct val="132000"/>
+              </a:lnSpc>
+              <a:spcAft>
+                <a:spcPts val="400"/>
+              </a:spcAft>
+            </a:pPr>
+            <a:r>
+              <a:rPr sz="980" b="0">
+                <a:solidFill>
+                  <a:srgbClr val="5A6B76"/>
+                </a:solidFill>
+                <a:latin typeface="맑은 고딕"/>
+                <a:ea typeface="맑은 고딕"/>
+                <a:cs typeface="맑은 고딕"/>
+              </a:rPr>
+              <a:t>재삽입은 하드웨어 값이 없고(순수 구독) 시술은 고정 인력이 한다 →
+ </a:t>
+            </a:r>
+            <a:r>
+              <a:rPr sz="980" b="1">
+                <a:solidFill>
+                  <a:srgbClr val="0B2239"/>
+                </a:solidFill>
+                <a:latin typeface="맑은 고딕"/>
+                <a:ea typeface="맑은 고딕"/>
+                <a:cs typeface="맑은 고딕"/>
+              </a:rPr>
+              <a:t>현장 CS 1인당 약 12,000두</a:t>
+            </a:r>
+            <a:r>
+              <a:rPr sz="980" b="0">
+                <a:solidFill>
+                  <a:srgbClr val="5A6B76"/>
+                </a:solidFill>
+                <a:latin typeface="맑은 고딕"/>
+                <a:ea typeface="맑은 고딕"/>
+                <a:cs typeface="맑은 고딕"/>
+              </a:rPr>
+              <a:t>(도태율 25%)라는 조직 규칙으로 다룬다.</a:t>
             </a:r>
           </a:p>
         </p:txBody>
@@ -48249,7 +48313,7 @@
                 <a:ea typeface="맑은 고딕"/>
                 <a:cs typeface="맑은 고딕"/>
               </a:rPr>
-              <a:t> — 신규가 멈추면 0.
+              <a:t> — 신규가 멈추면 구독 2,450원만 남는다.
  </a:t>
             </a:r>
             <a:r>
@@ -48261,7 +48325,7 @@
                 <a:ea typeface="맑은 고딕"/>
                 <a:cs typeface="맑은 고딕"/>
               </a:rPr>
-              <a:t>재삽입 원가 미계상</a:t>
+              <a:t>채널은 볼륨 다음에</a:t>
             </a:r>
             <a:r>
               <a:rPr sz="980" b="0">
@@ -48272,7 +48336,7 @@
                 <a:ea typeface="맑은 고딕"/>
                 <a:cs typeface="맑은 고딕"/>
               </a:rPr>
-              <a:t> — 도태율 30%면 구독 기여이익의 34%.</a:t>
+              <a:t> — 단가를 10% 낮춰 생긴 800원이 수수료 재원이다.</a:t>
             </a:r>
           </a:p>
         </p:txBody>
